--- a/presentations/05-asm-first-contact/05-asm-first-contact-lecture.pptx
+++ b/presentations/05-asm-first-contact/05-asm-first-contact-lecture.pptx
@@ -143,7 +143,7 @@
   <p:extLst>
     <p:ext uri="{521415D9-36F7-43E2-AB2F-B90AF26B5E84}">
       <p14:sectionLst xmlns:p14="http://schemas.microsoft.com/office/powerpoint/2010/main">
-        <p14:section name="Opening" id="{e3bbc695-5077-248e-c4ec-ffc2688650f7}">
+        <p14:section name="Opening" id="{05c0824f-d7c6-00f9-a46e-1139d7d7ee22}">
           <p14:sldIdLst>
             <p14:sldId id="256"/>
             <p14:sldId id="257"/>
@@ -155,14 +155,14 @@
             <p14:sldId id="263"/>
           </p14:sldIdLst>
         </p14:section>
-        <p14:section name="The smallest program" id="{f8811673-28ca-37b8-9c70-4b2dcccdc76a}">
+        <p14:section name="The smallest program" id="{13c4ea23-f118-dc7d-63e2-5a69e2c4d07b}">
           <p14:sldIdLst>
             <p14:sldId id="264"/>
             <p14:sldId id="265"/>
             <p14:sldId id="266"/>
           </p14:sldIdLst>
         </p14:section>
-        <p14:section name="Instructions" id="{8cd8c158-44f9-8aa7-8ca1-10d420232be4}">
+        <p14:section name="Instructions" id="{81806f1b-8f5d-c3b6-6946-1d21ce0c10ce}">
           <p14:sldIdLst>
             <p14:sldId id="267"/>
             <p14:sldId id="268"/>
@@ -174,7 +174,7 @@
             <p14:sldId id="274"/>
           </p14:sldIdLst>
         </p14:section>
-        <p14:section name="The call" id="{b427676f-21ca-ac0c-2116-e6aa48367da8}">
+        <p14:section name="The call" id="{bd279eb5-19ff-a32d-566c-4201ff9f80d7}">
           <p14:sldIdLst>
             <p14:sldId id="275"/>
             <p14:sldId id="276"/>
@@ -186,7 +186,7 @@
             <p14:sldId id="282"/>
           </p14:sldIdLst>
         </p14:section>
-        <p14:section name="Sections and memory" id="{36937c33-fc30-d480-c982-2357386df61c}">
+        <p14:section name="Sections and memory" id="{a7c7fb08-7728-98dc-3781-dc259fcab9ac}">
           <p14:sldIdLst>
             <p14:sldId id="283"/>
             <p14:sldId id="284"/>
@@ -196,14 +196,14 @@
             <p14:sldId id="288"/>
           </p14:sldIdLst>
         </p14:section>
-        <p14:section name="A program that ticks" id="{15142e47-86ff-5407-3bb9-f4ffbddaf80b}">
+        <p14:section name="A program that ticks" id="{a8c2b789-18b7-68d6-91b1-6066dded10b3}">
           <p14:sldIdLst>
             <p14:sldId id="289"/>
             <p14:sldId id="290"/>
             <p14:sldId id="291"/>
           </p14:sldIdLst>
         </p14:section>
-        <p14:section name="Closing" id="{682c6f5f-67b2-b14f-13e0-08a6195e9909}">
+        <p14:section name="Closing" id="{eee607c2-0358-80d7-93b2-46784c449e62}">
           <p14:sldIdLst>
             <p14:sldId id="292"/>
           </p14:sldIdLst>
